--- a/TD.pptx
+++ b/TD.pptx
@@ -110,6 +110,11 @@
       </a:defRPr>
     </a:lvl9pPr>
   </p:defaultTextStyle>
+  <p:extLst>
+    <p:ext uri="{EFAFB233-063F-42B5-8137-9DF3F51BA10A}">
+      <p15:sldGuideLst xmlns:p15="http://schemas.microsoft.com/office/powerpoint/2012/main"/>
+    </p:ext>
+  </p:extLst>
 </p:presentation>
 </file>
 
@@ -1824,7 +1829,7 @@
           </a:prstGeom>
           <a:extLst>
             <a:ext uri="{C572A759-6A51-4108-AA02-DFA0A04FC94B}">
-              <ma14:wrappingTextBoxFlag xmlns="" xmlns:ma14="http://schemas.microsoft.com/office/mac/drawingml/2011/main" val="0"/>
+              <ma14:wrappingTextBoxFlag xmlns:ma14="http://schemas.microsoft.com/office/mac/drawingml/2011/main" xmlns="" val="0"/>
             </a:ext>
           </a:extLst>
         </p:spPr>
@@ -2619,7 +2624,7 @@
           </a:prstGeom>
           <a:extLst>
             <a:ext uri="{C572A759-6A51-4108-AA02-DFA0A04FC94B}">
-              <ma14:wrappingTextBoxFlag xmlns="" xmlns:ma14="http://schemas.microsoft.com/office/mac/drawingml/2011/main" val="0"/>
+              <ma14:wrappingTextBoxFlag xmlns:ma14="http://schemas.microsoft.com/office/mac/drawingml/2011/main" xmlns="" val="0"/>
             </a:ext>
           </a:extLst>
         </p:spPr>
@@ -3055,7 +3060,7 @@
           </a:prstGeom>
           <a:extLst>
             <a:ext uri="{C572A759-6A51-4108-AA02-DFA0A04FC94B}">
-              <ma14:wrappingTextBoxFlag xmlns="" xmlns:ma14="http://schemas.microsoft.com/office/mac/drawingml/2011/main" val="0"/>
+              <ma14:wrappingTextBoxFlag xmlns:ma14="http://schemas.microsoft.com/office/mac/drawingml/2011/main" xmlns="" val="0"/>
             </a:ext>
           </a:extLst>
         </p:spPr>
@@ -4143,7 +4148,7 @@
           </a:prstGeom>
           <a:extLst>
             <a:ext uri="{C572A759-6A51-4108-AA02-DFA0A04FC94B}">
-              <ma14:wrappingTextBoxFlag xmlns="" xmlns:ma14="http://schemas.microsoft.com/office/mac/drawingml/2011/main" val="0"/>
+              <ma14:wrappingTextBoxFlag xmlns:ma14="http://schemas.microsoft.com/office/mac/drawingml/2011/main" xmlns="" val="0"/>
             </a:ext>
           </a:extLst>
         </p:spPr>
@@ -4644,7 +4649,7 @@
           </a:prstGeom>
           <a:extLst>
             <a:ext uri="{C572A759-6A51-4108-AA02-DFA0A04FC94B}">
-              <ma14:wrappingTextBoxFlag xmlns="" xmlns:ma14="http://schemas.microsoft.com/office/mac/drawingml/2011/main" val="0"/>
+              <ma14:wrappingTextBoxFlag xmlns:ma14="http://schemas.microsoft.com/office/mac/drawingml/2011/main" xmlns="" val="0"/>
             </a:ext>
           </a:extLst>
         </p:spPr>
@@ -5880,7 +5885,7 @@
           </a:prstGeom>
           <a:extLst>
             <a:ext uri="{C572A759-6A51-4108-AA02-DFA0A04FC94B}">
-              <ma14:wrappingTextBoxFlag xmlns="" xmlns:ma14="http://schemas.microsoft.com/office/mac/drawingml/2011/main" val="0"/>
+              <ma14:wrappingTextBoxFlag xmlns:ma14="http://schemas.microsoft.com/office/mac/drawingml/2011/main" xmlns="" val="0"/>
             </a:ext>
           </a:extLst>
         </p:spPr>
@@ -6675,7 +6680,7 @@
           </a:prstGeom>
           <a:extLst>
             <a:ext uri="{C572A759-6A51-4108-AA02-DFA0A04FC94B}">
-              <ma14:wrappingTextBoxFlag xmlns="" xmlns:ma14="http://schemas.microsoft.com/office/mac/drawingml/2011/main" val="0"/>
+              <ma14:wrappingTextBoxFlag xmlns:ma14="http://schemas.microsoft.com/office/mac/drawingml/2011/main" xmlns="" val="0"/>
             </a:ext>
           </a:extLst>
         </p:spPr>
@@ -7551,7 +7556,7 @@
           </a:prstGeom>
           <a:extLst>
             <a:ext uri="{C572A759-6A51-4108-AA02-DFA0A04FC94B}">
-              <ma14:wrappingTextBoxFlag xmlns="" xmlns:ma14="http://schemas.microsoft.com/office/mac/drawingml/2011/main" val="0"/>
+              <ma14:wrappingTextBoxFlag xmlns:ma14="http://schemas.microsoft.com/office/mac/drawingml/2011/main" xmlns="" val="0"/>
             </a:ext>
           </a:extLst>
         </p:spPr>
@@ -7763,7 +7768,7 @@
           </a:prstGeom>
           <a:extLst>
             <a:ext uri="{C572A759-6A51-4108-AA02-DFA0A04FC94B}">
-              <ma14:wrappingTextBoxFlag xmlns="" xmlns:ma14="http://schemas.microsoft.com/office/mac/drawingml/2011/main" val="0"/>
+              <ma14:wrappingTextBoxFlag xmlns:ma14="http://schemas.microsoft.com/office/mac/drawingml/2011/main" xmlns="" val="0"/>
             </a:ext>
           </a:extLst>
         </p:spPr>
@@ -8068,14 +8073,336 @@
           </a:lstStyle>
           <a:p>
             <a:r>
-              <a:rPr lang="en-US">
+              <a:rPr lang="en-US" dirty="0">
                 <a:solidFill>
                   <a:srgbClr val="72D0ED"/>
                 </a:solidFill>
               </a:rPr>
               <a:t>time for your questions..</a:t>
             </a:r>
-            <a:endParaRPr lang="cs-CZ"/>
+            <a:endParaRPr lang="cs-CZ" dirty="0"/>
+          </a:p>
+        </p:txBody>
+      </p:sp>
+      <p:sp>
+        <p:nvSpPr>
+          <p:cNvPr id="2" name="Text 3">
+            <a:extLst>
+              <a:ext uri="{FF2B5EF4-FFF2-40B4-BE49-F238E27FC236}">
+                <a16:creationId xmlns:a16="http://schemas.microsoft.com/office/drawing/2014/main" id="{5B52A09E-008F-A77B-590A-A88F0C2BCFE6}"/>
+              </a:ext>
+            </a:extLst>
+          </p:cNvPr>
+          <p:cNvSpPr/>
+          <p:nvPr/>
+        </p:nvSpPr>
+        <p:spPr>
+          <a:xfrm>
+            <a:off x="3769351" y="4969764"/>
+            <a:ext cx="4387662" cy="393192"/>
+          </a:xfrm>
+          <a:prstGeom prst="rect">
+            <a:avLst/>
+          </a:prstGeom>
+          <a:noFill/>
+          <a:ln/>
+        </p:spPr>
+        <p:txBody>
+          <a:bodyPr wrap="square" lIns="0" tIns="0" rIns="0" bIns="0" rtlCol="0" anchor="ctr"/>
+          <a:lstStyle>
+            <a:lvl1pPr marL="0" algn="l" defTabSz="914400" rtl="0" eaLnBrk="1" latinLnBrk="0" hangingPunct="1">
+              <a:defRPr sz="1800" kern="1200">
+                <a:solidFill>
+                  <a:schemeClr val="tx1"/>
+                </a:solidFill>
+                <a:latin typeface="+mn-lt"/>
+                <a:ea typeface="+mn-ea"/>
+                <a:cs typeface="+mn-cs"/>
+              </a:defRPr>
+            </a:lvl1pPr>
+            <a:lvl2pPr marL="457200" algn="l" defTabSz="914400" rtl="0" eaLnBrk="1" latinLnBrk="0" hangingPunct="1">
+              <a:defRPr sz="1800" kern="1200">
+                <a:solidFill>
+                  <a:schemeClr val="tx1"/>
+                </a:solidFill>
+                <a:latin typeface="+mn-lt"/>
+                <a:ea typeface="+mn-ea"/>
+                <a:cs typeface="+mn-cs"/>
+              </a:defRPr>
+            </a:lvl2pPr>
+            <a:lvl3pPr marL="914400" algn="l" defTabSz="914400" rtl="0" eaLnBrk="1" latinLnBrk="0" hangingPunct="1">
+              <a:defRPr sz="1800" kern="1200">
+                <a:solidFill>
+                  <a:schemeClr val="tx1"/>
+                </a:solidFill>
+                <a:latin typeface="+mn-lt"/>
+                <a:ea typeface="+mn-ea"/>
+                <a:cs typeface="+mn-cs"/>
+              </a:defRPr>
+            </a:lvl3pPr>
+            <a:lvl4pPr marL="1371600" algn="l" defTabSz="914400" rtl="0" eaLnBrk="1" latinLnBrk="0" hangingPunct="1">
+              <a:defRPr sz="1800" kern="1200">
+                <a:solidFill>
+                  <a:schemeClr val="tx1"/>
+                </a:solidFill>
+                <a:latin typeface="+mn-lt"/>
+                <a:ea typeface="+mn-ea"/>
+                <a:cs typeface="+mn-cs"/>
+              </a:defRPr>
+            </a:lvl4pPr>
+            <a:lvl5pPr marL="1828800" algn="l" defTabSz="914400" rtl="0" eaLnBrk="1" latinLnBrk="0" hangingPunct="1">
+              <a:defRPr sz="1800" kern="1200">
+                <a:solidFill>
+                  <a:schemeClr val="tx1"/>
+                </a:solidFill>
+                <a:latin typeface="+mn-lt"/>
+                <a:ea typeface="+mn-ea"/>
+                <a:cs typeface="+mn-cs"/>
+              </a:defRPr>
+            </a:lvl5pPr>
+            <a:lvl6pPr marL="2286000" algn="l" defTabSz="914400" rtl="0" eaLnBrk="1" latinLnBrk="0" hangingPunct="1">
+              <a:defRPr sz="1800" kern="1200">
+                <a:solidFill>
+                  <a:schemeClr val="tx1"/>
+                </a:solidFill>
+                <a:latin typeface="+mn-lt"/>
+                <a:ea typeface="+mn-ea"/>
+                <a:cs typeface="+mn-cs"/>
+              </a:defRPr>
+            </a:lvl6pPr>
+            <a:lvl7pPr marL="2743200" algn="l" defTabSz="914400" rtl="0" eaLnBrk="1" latinLnBrk="0" hangingPunct="1">
+              <a:defRPr sz="1800" kern="1200">
+                <a:solidFill>
+                  <a:schemeClr val="tx1"/>
+                </a:solidFill>
+                <a:latin typeface="+mn-lt"/>
+                <a:ea typeface="+mn-ea"/>
+                <a:cs typeface="+mn-cs"/>
+              </a:defRPr>
+            </a:lvl7pPr>
+            <a:lvl8pPr marL="3200400" algn="l" defTabSz="914400" rtl="0" eaLnBrk="1" latinLnBrk="0" hangingPunct="1">
+              <a:defRPr sz="1800" kern="1200">
+                <a:solidFill>
+                  <a:schemeClr val="tx1"/>
+                </a:solidFill>
+                <a:latin typeface="+mn-lt"/>
+                <a:ea typeface="+mn-ea"/>
+                <a:cs typeface="+mn-cs"/>
+              </a:defRPr>
+            </a:lvl8pPr>
+            <a:lvl9pPr marL="3657600" algn="l" defTabSz="914400" rtl="0" eaLnBrk="1" latinLnBrk="0" hangingPunct="1">
+              <a:defRPr sz="1800" kern="1200">
+                <a:solidFill>
+                  <a:schemeClr val="tx1"/>
+                </a:solidFill>
+                <a:latin typeface="+mn-lt"/>
+                <a:ea typeface="+mn-ea"/>
+                <a:cs typeface="+mn-cs"/>
+              </a:defRPr>
+            </a:lvl9pPr>
+          </a:lstStyle>
+          <a:p>
+            <a:r>
+              <a:rPr lang="en-US" dirty="0">
+                <a:solidFill>
+                  <a:srgbClr val="72D0ED"/>
+                </a:solidFill>
+              </a:rPr>
+              <a:t>https://</a:t>
+            </a:r>
+            <a:r>
+              <a:rPr lang="en-US" dirty="0" err="1">
+                <a:solidFill>
+                  <a:srgbClr val="72D0ED"/>
+                </a:solidFill>
+              </a:rPr>
+              <a:t>www.linkedin.com</a:t>
+            </a:r>
+            <a:r>
+              <a:rPr lang="en-US" dirty="0">
+                <a:solidFill>
+                  <a:srgbClr val="72D0ED"/>
+                </a:solidFill>
+              </a:rPr>
+              <a:t>/in/</a:t>
+            </a:r>
+            <a:r>
+              <a:rPr lang="en-US" dirty="0" err="1">
+                <a:solidFill>
+                  <a:srgbClr val="72D0ED"/>
+                </a:solidFill>
+              </a:rPr>
+              <a:t>fedurca</a:t>
+            </a:r>
+            <a:r>
+              <a:rPr lang="en-US" dirty="0">
+                <a:solidFill>
+                  <a:srgbClr val="72D0ED"/>
+                </a:solidFill>
+              </a:rPr>
+              <a:t>/</a:t>
+            </a:r>
+            <a:endParaRPr lang="cs-CZ" dirty="0"/>
+          </a:p>
+        </p:txBody>
+      </p:sp>
+      <p:pic>
+        <p:nvPicPr>
+          <p:cNvPr id="5" name="Picture 4">
+            <a:extLst>
+              <a:ext uri="{FF2B5EF4-FFF2-40B4-BE49-F238E27FC236}">
+                <a16:creationId xmlns:a16="http://schemas.microsoft.com/office/drawing/2014/main" id="{4194F7EA-A9F8-462A-41F7-A38D06640F18}"/>
+              </a:ext>
+            </a:extLst>
+          </p:cNvPr>
+          <p:cNvPicPr>
+            <a:picLocks noChangeAspect="1"/>
+          </p:cNvPicPr>
+          <p:nvPr/>
+        </p:nvPicPr>
+        <p:blipFill>
+          <a:blip r:embed="rId4"/>
+          <a:stretch>
+            <a:fillRect/>
+          </a:stretch>
+        </p:blipFill>
+        <p:spPr>
+          <a:xfrm>
+            <a:off x="7572770" y="4023360"/>
+            <a:ext cx="1229164" cy="1234440"/>
+          </a:xfrm>
+          <a:prstGeom prst="rect">
+            <a:avLst/>
+          </a:prstGeom>
+        </p:spPr>
+      </p:pic>
+      <p:sp>
+        <p:nvSpPr>
+          <p:cNvPr id="6" name="Text 3">
+            <a:extLst>
+              <a:ext uri="{FF2B5EF4-FFF2-40B4-BE49-F238E27FC236}">
+                <a16:creationId xmlns:a16="http://schemas.microsoft.com/office/drawing/2014/main" id="{16761239-D806-CCCB-13CA-D2C1AF5417DF}"/>
+              </a:ext>
+            </a:extLst>
+          </p:cNvPr>
+          <p:cNvSpPr/>
+          <p:nvPr/>
+        </p:nvSpPr>
+        <p:spPr>
+          <a:xfrm>
+            <a:off x="3769351" y="4646542"/>
+            <a:ext cx="7132320" cy="393192"/>
+          </a:xfrm>
+          <a:prstGeom prst="rect">
+            <a:avLst/>
+          </a:prstGeom>
+          <a:noFill/>
+          <a:ln/>
+        </p:spPr>
+        <p:txBody>
+          <a:bodyPr wrap="square" lIns="0" tIns="0" rIns="0" bIns="0" rtlCol="0" anchor="ctr"/>
+          <a:lstStyle>
+            <a:lvl1pPr marL="0" algn="l" defTabSz="914400" rtl="0" eaLnBrk="1" latinLnBrk="0" hangingPunct="1">
+              <a:defRPr sz="1800" kern="1200">
+                <a:solidFill>
+                  <a:schemeClr val="tx1"/>
+                </a:solidFill>
+                <a:latin typeface="+mn-lt"/>
+                <a:ea typeface="+mn-ea"/>
+                <a:cs typeface="+mn-cs"/>
+              </a:defRPr>
+            </a:lvl1pPr>
+            <a:lvl2pPr marL="457200" algn="l" defTabSz="914400" rtl="0" eaLnBrk="1" latinLnBrk="0" hangingPunct="1">
+              <a:defRPr sz="1800" kern="1200">
+                <a:solidFill>
+                  <a:schemeClr val="tx1"/>
+                </a:solidFill>
+                <a:latin typeface="+mn-lt"/>
+                <a:ea typeface="+mn-ea"/>
+                <a:cs typeface="+mn-cs"/>
+              </a:defRPr>
+            </a:lvl2pPr>
+            <a:lvl3pPr marL="914400" algn="l" defTabSz="914400" rtl="0" eaLnBrk="1" latinLnBrk="0" hangingPunct="1">
+              <a:defRPr sz="1800" kern="1200">
+                <a:solidFill>
+                  <a:schemeClr val="tx1"/>
+                </a:solidFill>
+                <a:latin typeface="+mn-lt"/>
+                <a:ea typeface="+mn-ea"/>
+                <a:cs typeface="+mn-cs"/>
+              </a:defRPr>
+            </a:lvl3pPr>
+            <a:lvl4pPr marL="1371600" algn="l" defTabSz="914400" rtl="0" eaLnBrk="1" latinLnBrk="0" hangingPunct="1">
+              <a:defRPr sz="1800" kern="1200">
+                <a:solidFill>
+                  <a:schemeClr val="tx1"/>
+                </a:solidFill>
+                <a:latin typeface="+mn-lt"/>
+                <a:ea typeface="+mn-ea"/>
+                <a:cs typeface="+mn-cs"/>
+              </a:defRPr>
+            </a:lvl4pPr>
+            <a:lvl5pPr marL="1828800" algn="l" defTabSz="914400" rtl="0" eaLnBrk="1" latinLnBrk="0" hangingPunct="1">
+              <a:defRPr sz="1800" kern="1200">
+                <a:solidFill>
+                  <a:schemeClr val="tx1"/>
+                </a:solidFill>
+                <a:latin typeface="+mn-lt"/>
+                <a:ea typeface="+mn-ea"/>
+                <a:cs typeface="+mn-cs"/>
+              </a:defRPr>
+            </a:lvl5pPr>
+            <a:lvl6pPr marL="2286000" algn="l" defTabSz="914400" rtl="0" eaLnBrk="1" latinLnBrk="0" hangingPunct="1">
+              <a:defRPr sz="1800" kern="1200">
+                <a:solidFill>
+                  <a:schemeClr val="tx1"/>
+                </a:solidFill>
+                <a:latin typeface="+mn-lt"/>
+                <a:ea typeface="+mn-ea"/>
+                <a:cs typeface="+mn-cs"/>
+              </a:defRPr>
+            </a:lvl6pPr>
+            <a:lvl7pPr marL="2743200" algn="l" defTabSz="914400" rtl="0" eaLnBrk="1" latinLnBrk="0" hangingPunct="1">
+              <a:defRPr sz="1800" kern="1200">
+                <a:solidFill>
+                  <a:schemeClr val="tx1"/>
+                </a:solidFill>
+                <a:latin typeface="+mn-lt"/>
+                <a:ea typeface="+mn-ea"/>
+                <a:cs typeface="+mn-cs"/>
+              </a:defRPr>
+            </a:lvl7pPr>
+            <a:lvl8pPr marL="3200400" algn="l" defTabSz="914400" rtl="0" eaLnBrk="1" latinLnBrk="0" hangingPunct="1">
+              <a:defRPr sz="1800" kern="1200">
+                <a:solidFill>
+                  <a:schemeClr val="tx1"/>
+                </a:solidFill>
+                <a:latin typeface="+mn-lt"/>
+                <a:ea typeface="+mn-ea"/>
+                <a:cs typeface="+mn-cs"/>
+              </a:defRPr>
+            </a:lvl8pPr>
+            <a:lvl9pPr marL="3657600" algn="l" defTabSz="914400" rtl="0" eaLnBrk="1" latinLnBrk="0" hangingPunct="1">
+              <a:defRPr sz="1800" kern="1200">
+                <a:solidFill>
+                  <a:schemeClr val="tx1"/>
+                </a:solidFill>
+                <a:latin typeface="+mn-lt"/>
+                <a:ea typeface="+mn-ea"/>
+                <a:cs typeface="+mn-cs"/>
+              </a:defRPr>
+            </a:lvl9pPr>
+          </a:lstStyle>
+          <a:p>
+            <a:r>
+              <a:rPr lang="en-US" dirty="0">
+                <a:solidFill>
+                  <a:srgbClr val="72D0ED"/>
+                </a:solidFill>
+              </a:rPr>
+              <a:t>Let’s connect..</a:t>
+            </a:r>
+            <a:endParaRPr lang="cs-CZ" dirty="0"/>
           </a:p>
         </p:txBody>
       </p:sp>

--- a/TD.pptx
+++ b/TD.pptx
@@ -1829,7 +1829,7 @@
           </a:prstGeom>
           <a:extLst>
             <a:ext uri="{C572A759-6A51-4108-AA02-DFA0A04FC94B}">
-              <ma14:wrappingTextBoxFlag xmlns:ma14="http://schemas.microsoft.com/office/mac/drawingml/2011/main" xmlns="" val="0"/>
+              <ma14:wrappingTextBoxFlag xmlns="" xmlns:ma14="http://schemas.microsoft.com/office/mac/drawingml/2011/main" val="0"/>
             </a:ext>
           </a:extLst>
         </p:spPr>
@@ -2624,7 +2624,7 @@
           </a:prstGeom>
           <a:extLst>
             <a:ext uri="{C572A759-6A51-4108-AA02-DFA0A04FC94B}">
-              <ma14:wrappingTextBoxFlag xmlns:ma14="http://schemas.microsoft.com/office/mac/drawingml/2011/main" xmlns="" val="0"/>
+              <ma14:wrappingTextBoxFlag xmlns="" xmlns:ma14="http://schemas.microsoft.com/office/mac/drawingml/2011/main" val="0"/>
             </a:ext>
           </a:extLst>
         </p:spPr>
@@ -3060,7 +3060,7 @@
           </a:prstGeom>
           <a:extLst>
             <a:ext uri="{C572A759-6A51-4108-AA02-DFA0A04FC94B}">
-              <ma14:wrappingTextBoxFlag xmlns:ma14="http://schemas.microsoft.com/office/mac/drawingml/2011/main" xmlns="" val="0"/>
+              <ma14:wrappingTextBoxFlag xmlns="" xmlns:ma14="http://schemas.microsoft.com/office/mac/drawingml/2011/main" val="0"/>
             </a:ext>
           </a:extLst>
         </p:spPr>
@@ -4148,7 +4148,7 @@
           </a:prstGeom>
           <a:extLst>
             <a:ext uri="{C572A759-6A51-4108-AA02-DFA0A04FC94B}">
-              <ma14:wrappingTextBoxFlag xmlns:ma14="http://schemas.microsoft.com/office/mac/drawingml/2011/main" xmlns="" val="0"/>
+              <ma14:wrappingTextBoxFlag xmlns="" xmlns:ma14="http://schemas.microsoft.com/office/mac/drawingml/2011/main" val="0"/>
             </a:ext>
           </a:extLst>
         </p:spPr>
@@ -4649,7 +4649,7 @@
           </a:prstGeom>
           <a:extLst>
             <a:ext uri="{C572A759-6A51-4108-AA02-DFA0A04FC94B}">
-              <ma14:wrappingTextBoxFlag xmlns:ma14="http://schemas.microsoft.com/office/mac/drawingml/2011/main" xmlns="" val="0"/>
+              <ma14:wrappingTextBoxFlag xmlns="" xmlns:ma14="http://schemas.microsoft.com/office/mac/drawingml/2011/main" val="0"/>
             </a:ext>
           </a:extLst>
         </p:spPr>
@@ -5885,7 +5885,7 @@
           </a:prstGeom>
           <a:extLst>
             <a:ext uri="{C572A759-6A51-4108-AA02-DFA0A04FC94B}">
-              <ma14:wrappingTextBoxFlag xmlns:ma14="http://schemas.microsoft.com/office/mac/drawingml/2011/main" xmlns="" val="0"/>
+              <ma14:wrappingTextBoxFlag xmlns="" xmlns:ma14="http://schemas.microsoft.com/office/mac/drawingml/2011/main" val="0"/>
             </a:ext>
           </a:extLst>
         </p:spPr>
@@ -6680,7 +6680,7 @@
           </a:prstGeom>
           <a:extLst>
             <a:ext uri="{C572A759-6A51-4108-AA02-DFA0A04FC94B}">
-              <ma14:wrappingTextBoxFlag xmlns:ma14="http://schemas.microsoft.com/office/mac/drawingml/2011/main" xmlns="" val="0"/>
+              <ma14:wrappingTextBoxFlag xmlns="" xmlns:ma14="http://schemas.microsoft.com/office/mac/drawingml/2011/main" val="0"/>
             </a:ext>
           </a:extLst>
         </p:spPr>
@@ -7556,7 +7556,7 @@
           </a:prstGeom>
           <a:extLst>
             <a:ext uri="{C572A759-6A51-4108-AA02-DFA0A04FC94B}">
-              <ma14:wrappingTextBoxFlag xmlns:ma14="http://schemas.microsoft.com/office/mac/drawingml/2011/main" xmlns="" val="0"/>
+              <ma14:wrappingTextBoxFlag xmlns="" xmlns:ma14="http://schemas.microsoft.com/office/mac/drawingml/2011/main" val="0"/>
             </a:ext>
           </a:extLst>
         </p:spPr>
@@ -7768,7 +7768,7 @@
           </a:prstGeom>
           <a:extLst>
             <a:ext uri="{C572A759-6A51-4108-AA02-DFA0A04FC94B}">
-              <ma14:wrappingTextBoxFlag xmlns:ma14="http://schemas.microsoft.com/office/mac/drawingml/2011/main" xmlns="" val="0"/>
+              <ma14:wrappingTextBoxFlag xmlns="" xmlns:ma14="http://schemas.microsoft.com/office/mac/drawingml/2011/main" val="0"/>
             </a:ext>
           </a:extLst>
         </p:spPr>
@@ -8246,12 +8246,142 @@
           </a:p>
         </p:txBody>
       </p:sp>
+      <p:sp>
+        <p:nvSpPr>
+          <p:cNvPr id="6" name="Text 3">
+            <a:extLst>
+              <a:ext uri="{FF2B5EF4-FFF2-40B4-BE49-F238E27FC236}">
+                <a16:creationId xmlns:a16="http://schemas.microsoft.com/office/drawing/2014/main" id="{16761239-D806-CCCB-13CA-D2C1AF5417DF}"/>
+              </a:ext>
+            </a:extLst>
+          </p:cNvPr>
+          <p:cNvSpPr/>
+          <p:nvPr/>
+        </p:nvSpPr>
+        <p:spPr>
+          <a:xfrm>
+            <a:off x="3769351" y="4646542"/>
+            <a:ext cx="7132320" cy="393192"/>
+          </a:xfrm>
+          <a:prstGeom prst="rect">
+            <a:avLst/>
+          </a:prstGeom>
+          <a:noFill/>
+          <a:ln/>
+        </p:spPr>
+        <p:txBody>
+          <a:bodyPr wrap="square" lIns="0" tIns="0" rIns="0" bIns="0" rtlCol="0" anchor="ctr"/>
+          <a:lstStyle>
+            <a:lvl1pPr marL="0" algn="l" defTabSz="914400" rtl="0" eaLnBrk="1" latinLnBrk="0" hangingPunct="1">
+              <a:defRPr sz="1800" kern="1200">
+                <a:solidFill>
+                  <a:schemeClr val="tx1"/>
+                </a:solidFill>
+                <a:latin typeface="+mn-lt"/>
+                <a:ea typeface="+mn-ea"/>
+                <a:cs typeface="+mn-cs"/>
+              </a:defRPr>
+            </a:lvl1pPr>
+            <a:lvl2pPr marL="457200" algn="l" defTabSz="914400" rtl="0" eaLnBrk="1" latinLnBrk="0" hangingPunct="1">
+              <a:defRPr sz="1800" kern="1200">
+                <a:solidFill>
+                  <a:schemeClr val="tx1"/>
+                </a:solidFill>
+                <a:latin typeface="+mn-lt"/>
+                <a:ea typeface="+mn-ea"/>
+                <a:cs typeface="+mn-cs"/>
+              </a:defRPr>
+            </a:lvl2pPr>
+            <a:lvl3pPr marL="914400" algn="l" defTabSz="914400" rtl="0" eaLnBrk="1" latinLnBrk="0" hangingPunct="1">
+              <a:defRPr sz="1800" kern="1200">
+                <a:solidFill>
+                  <a:schemeClr val="tx1"/>
+                </a:solidFill>
+                <a:latin typeface="+mn-lt"/>
+                <a:ea typeface="+mn-ea"/>
+                <a:cs typeface="+mn-cs"/>
+              </a:defRPr>
+            </a:lvl3pPr>
+            <a:lvl4pPr marL="1371600" algn="l" defTabSz="914400" rtl="0" eaLnBrk="1" latinLnBrk="0" hangingPunct="1">
+              <a:defRPr sz="1800" kern="1200">
+                <a:solidFill>
+                  <a:schemeClr val="tx1"/>
+                </a:solidFill>
+                <a:latin typeface="+mn-lt"/>
+                <a:ea typeface="+mn-ea"/>
+                <a:cs typeface="+mn-cs"/>
+              </a:defRPr>
+            </a:lvl4pPr>
+            <a:lvl5pPr marL="1828800" algn="l" defTabSz="914400" rtl="0" eaLnBrk="1" latinLnBrk="0" hangingPunct="1">
+              <a:defRPr sz="1800" kern="1200">
+                <a:solidFill>
+                  <a:schemeClr val="tx1"/>
+                </a:solidFill>
+                <a:latin typeface="+mn-lt"/>
+                <a:ea typeface="+mn-ea"/>
+                <a:cs typeface="+mn-cs"/>
+              </a:defRPr>
+            </a:lvl5pPr>
+            <a:lvl6pPr marL="2286000" algn="l" defTabSz="914400" rtl="0" eaLnBrk="1" latinLnBrk="0" hangingPunct="1">
+              <a:defRPr sz="1800" kern="1200">
+                <a:solidFill>
+                  <a:schemeClr val="tx1"/>
+                </a:solidFill>
+                <a:latin typeface="+mn-lt"/>
+                <a:ea typeface="+mn-ea"/>
+                <a:cs typeface="+mn-cs"/>
+              </a:defRPr>
+            </a:lvl6pPr>
+            <a:lvl7pPr marL="2743200" algn="l" defTabSz="914400" rtl="0" eaLnBrk="1" latinLnBrk="0" hangingPunct="1">
+              <a:defRPr sz="1800" kern="1200">
+                <a:solidFill>
+                  <a:schemeClr val="tx1"/>
+                </a:solidFill>
+                <a:latin typeface="+mn-lt"/>
+                <a:ea typeface="+mn-ea"/>
+                <a:cs typeface="+mn-cs"/>
+              </a:defRPr>
+            </a:lvl7pPr>
+            <a:lvl8pPr marL="3200400" algn="l" defTabSz="914400" rtl="0" eaLnBrk="1" latinLnBrk="0" hangingPunct="1">
+              <a:defRPr sz="1800" kern="1200">
+                <a:solidFill>
+                  <a:schemeClr val="tx1"/>
+                </a:solidFill>
+                <a:latin typeface="+mn-lt"/>
+                <a:ea typeface="+mn-ea"/>
+                <a:cs typeface="+mn-cs"/>
+              </a:defRPr>
+            </a:lvl8pPr>
+            <a:lvl9pPr marL="3657600" algn="l" defTabSz="914400" rtl="0" eaLnBrk="1" latinLnBrk="0" hangingPunct="1">
+              <a:defRPr sz="1800" kern="1200">
+                <a:solidFill>
+                  <a:schemeClr val="tx1"/>
+                </a:solidFill>
+                <a:latin typeface="+mn-lt"/>
+                <a:ea typeface="+mn-ea"/>
+                <a:cs typeface="+mn-cs"/>
+              </a:defRPr>
+            </a:lvl9pPr>
+          </a:lstStyle>
+          <a:p>
+            <a:r>
+              <a:rPr lang="en-US" dirty="0">
+                <a:solidFill>
+                  <a:srgbClr val="72D0ED"/>
+                </a:solidFill>
+              </a:rPr>
+              <a:t>Let’s connect..</a:t>
+            </a:r>
+            <a:endParaRPr lang="cs-CZ" dirty="0"/>
+          </a:p>
+        </p:txBody>
+      </p:sp>
       <p:pic>
         <p:nvPicPr>
-          <p:cNvPr id="5" name="Picture 4">
+          <p:cNvPr id="7" name="Picture 6">
             <a:extLst>
               <a:ext uri="{FF2B5EF4-FFF2-40B4-BE49-F238E27FC236}">
-                <a16:creationId xmlns:a16="http://schemas.microsoft.com/office/drawing/2014/main" id="{4194F7EA-A9F8-462A-41F7-A38D06640F18}"/>
+                <a16:creationId xmlns:a16="http://schemas.microsoft.com/office/drawing/2014/main" id="{D2118084-842C-85F5-DB40-A782E24C5A96}"/>
               </a:ext>
             </a:extLst>
           </p:cNvPr>
@@ -8268,144 +8398,14 @@
         </p:blipFill>
         <p:spPr>
           <a:xfrm>
-            <a:off x="7572770" y="4023360"/>
-            <a:ext cx="1229164" cy="1234440"/>
+            <a:off x="6733319" y="2835766"/>
+            <a:ext cx="2026633" cy="2007372"/>
           </a:xfrm>
           <a:prstGeom prst="rect">
             <a:avLst/>
           </a:prstGeom>
         </p:spPr>
       </p:pic>
-      <p:sp>
-        <p:nvSpPr>
-          <p:cNvPr id="6" name="Text 3">
-            <a:extLst>
-              <a:ext uri="{FF2B5EF4-FFF2-40B4-BE49-F238E27FC236}">
-                <a16:creationId xmlns:a16="http://schemas.microsoft.com/office/drawing/2014/main" id="{16761239-D806-CCCB-13CA-D2C1AF5417DF}"/>
-              </a:ext>
-            </a:extLst>
-          </p:cNvPr>
-          <p:cNvSpPr/>
-          <p:nvPr/>
-        </p:nvSpPr>
-        <p:spPr>
-          <a:xfrm>
-            <a:off x="3769351" y="4646542"/>
-            <a:ext cx="7132320" cy="393192"/>
-          </a:xfrm>
-          <a:prstGeom prst="rect">
-            <a:avLst/>
-          </a:prstGeom>
-          <a:noFill/>
-          <a:ln/>
-        </p:spPr>
-        <p:txBody>
-          <a:bodyPr wrap="square" lIns="0" tIns="0" rIns="0" bIns="0" rtlCol="0" anchor="ctr"/>
-          <a:lstStyle>
-            <a:lvl1pPr marL="0" algn="l" defTabSz="914400" rtl="0" eaLnBrk="1" latinLnBrk="0" hangingPunct="1">
-              <a:defRPr sz="1800" kern="1200">
-                <a:solidFill>
-                  <a:schemeClr val="tx1"/>
-                </a:solidFill>
-                <a:latin typeface="+mn-lt"/>
-                <a:ea typeface="+mn-ea"/>
-                <a:cs typeface="+mn-cs"/>
-              </a:defRPr>
-            </a:lvl1pPr>
-            <a:lvl2pPr marL="457200" algn="l" defTabSz="914400" rtl="0" eaLnBrk="1" latinLnBrk="0" hangingPunct="1">
-              <a:defRPr sz="1800" kern="1200">
-                <a:solidFill>
-                  <a:schemeClr val="tx1"/>
-                </a:solidFill>
-                <a:latin typeface="+mn-lt"/>
-                <a:ea typeface="+mn-ea"/>
-                <a:cs typeface="+mn-cs"/>
-              </a:defRPr>
-            </a:lvl2pPr>
-            <a:lvl3pPr marL="914400" algn="l" defTabSz="914400" rtl="0" eaLnBrk="1" latinLnBrk="0" hangingPunct="1">
-              <a:defRPr sz="1800" kern="1200">
-                <a:solidFill>
-                  <a:schemeClr val="tx1"/>
-                </a:solidFill>
-                <a:latin typeface="+mn-lt"/>
-                <a:ea typeface="+mn-ea"/>
-                <a:cs typeface="+mn-cs"/>
-              </a:defRPr>
-            </a:lvl3pPr>
-            <a:lvl4pPr marL="1371600" algn="l" defTabSz="914400" rtl="0" eaLnBrk="1" latinLnBrk="0" hangingPunct="1">
-              <a:defRPr sz="1800" kern="1200">
-                <a:solidFill>
-                  <a:schemeClr val="tx1"/>
-                </a:solidFill>
-                <a:latin typeface="+mn-lt"/>
-                <a:ea typeface="+mn-ea"/>
-                <a:cs typeface="+mn-cs"/>
-              </a:defRPr>
-            </a:lvl4pPr>
-            <a:lvl5pPr marL="1828800" algn="l" defTabSz="914400" rtl="0" eaLnBrk="1" latinLnBrk="0" hangingPunct="1">
-              <a:defRPr sz="1800" kern="1200">
-                <a:solidFill>
-                  <a:schemeClr val="tx1"/>
-                </a:solidFill>
-                <a:latin typeface="+mn-lt"/>
-                <a:ea typeface="+mn-ea"/>
-                <a:cs typeface="+mn-cs"/>
-              </a:defRPr>
-            </a:lvl5pPr>
-            <a:lvl6pPr marL="2286000" algn="l" defTabSz="914400" rtl="0" eaLnBrk="1" latinLnBrk="0" hangingPunct="1">
-              <a:defRPr sz="1800" kern="1200">
-                <a:solidFill>
-                  <a:schemeClr val="tx1"/>
-                </a:solidFill>
-                <a:latin typeface="+mn-lt"/>
-                <a:ea typeface="+mn-ea"/>
-                <a:cs typeface="+mn-cs"/>
-              </a:defRPr>
-            </a:lvl6pPr>
-            <a:lvl7pPr marL="2743200" algn="l" defTabSz="914400" rtl="0" eaLnBrk="1" latinLnBrk="0" hangingPunct="1">
-              <a:defRPr sz="1800" kern="1200">
-                <a:solidFill>
-                  <a:schemeClr val="tx1"/>
-                </a:solidFill>
-                <a:latin typeface="+mn-lt"/>
-                <a:ea typeface="+mn-ea"/>
-                <a:cs typeface="+mn-cs"/>
-              </a:defRPr>
-            </a:lvl7pPr>
-            <a:lvl8pPr marL="3200400" algn="l" defTabSz="914400" rtl="0" eaLnBrk="1" latinLnBrk="0" hangingPunct="1">
-              <a:defRPr sz="1800" kern="1200">
-                <a:solidFill>
-                  <a:schemeClr val="tx1"/>
-                </a:solidFill>
-                <a:latin typeface="+mn-lt"/>
-                <a:ea typeface="+mn-ea"/>
-                <a:cs typeface="+mn-cs"/>
-              </a:defRPr>
-            </a:lvl8pPr>
-            <a:lvl9pPr marL="3657600" algn="l" defTabSz="914400" rtl="0" eaLnBrk="1" latinLnBrk="0" hangingPunct="1">
-              <a:defRPr sz="1800" kern="1200">
-                <a:solidFill>
-                  <a:schemeClr val="tx1"/>
-                </a:solidFill>
-                <a:latin typeface="+mn-lt"/>
-                <a:ea typeface="+mn-ea"/>
-                <a:cs typeface="+mn-cs"/>
-              </a:defRPr>
-            </a:lvl9pPr>
-          </a:lstStyle>
-          <a:p>
-            <a:r>
-              <a:rPr lang="en-US" dirty="0">
-                <a:solidFill>
-                  <a:srgbClr val="72D0ED"/>
-                </a:solidFill>
-              </a:rPr>
-              <a:t>Let’s connect..</a:t>
-            </a:r>
-            <a:endParaRPr lang="cs-CZ" dirty="0"/>
-          </a:p>
-        </p:txBody>
-      </p:sp>
     </p:spTree>
     <p:extLst>
       <p:ext uri="{BB962C8B-B14F-4D97-AF65-F5344CB8AC3E}">

--- a/TD.pptx
+++ b/TD.pptx
@@ -125,475 +125,6 @@
     <p1510:client id="{7437D7FF-36F5-7591-8794-4AF3F176C10B}" v="119" dt="2026-09-14T08:37:05.482"/>
   </p1510:revLst>
 </p1510:revInfo>
-</file>
-
-<file path=ppt/changesInfos/changesInfo1.xml><?xml version="1.0" encoding="utf-8"?>
-<pc:chgInfo xmlns:a="http://schemas.openxmlformats.org/drawingml/2006/main" xmlns:r="http://schemas.openxmlformats.org/officeDocument/2006/relationships" xmlns:ac="http://schemas.microsoft.com/office/drawing/2013/main/command" xmlns:pc="http://schemas.microsoft.com/office/powerpoint/2013/main/command">
-  <pc:docChgLst>
-    <pc:chgData name="Fedurca Luděk, Ing." userId="S::fedurca@spravazeleznic.cz::81cdee8f-9e75-4ae4-8978-85a63504bab6" providerId="AD" clId="Web-{00000000-0000-0000-0000-000000000000}"/>
-    <pc:docChg chg="addSld modSld">
-      <pc:chgData name="Fedurca Luděk, Ing." userId="S::fedurca@spravazeleznic.cz::81cdee8f-9e75-4ae4-8978-85a63504bab6" providerId="AD" clId="Web-{00000000-0000-0000-0000-000000000000}" dt="2026-09-14T08:34:05.742" v="39" actId="14100"/>
-      <pc:docMkLst>
-        <pc:docMk/>
-      </pc:docMkLst>
-      <pc:sldChg chg="addSp delSp modSp add replId">
-        <pc:chgData name="Fedurca Luděk, Ing." userId="S::fedurca@spravazeleznic.cz::81cdee8f-9e75-4ae4-8978-85a63504bab6" providerId="AD" clId="Web-{00000000-0000-0000-0000-000000000000}" dt="2026-09-14T08:34:05.742" v="39" actId="14100"/>
-        <pc:sldMkLst>
-          <pc:docMk/>
-          <pc:sldMk cId="2059199687" sldId="321"/>
-        </pc:sldMkLst>
-        <pc:spChg chg="mod">
-          <ac:chgData name="Fedurca Luděk, Ing." userId="S::fedurca@spravazeleznic.cz::81cdee8f-9e75-4ae4-8978-85a63504bab6" providerId="AD" clId="Web-{00000000-0000-0000-0000-000000000000}" dt="2026-09-14T08:33:15.944" v="33" actId="20577"/>
-          <ac:spMkLst>
-            <pc:docMk/>
-            <pc:sldMk cId="2059199687" sldId="321"/>
-            <ac:spMk id="2" creationId="{68A52910-E397-A7A2-AA39-6DCA85E80282}"/>
-          </ac:spMkLst>
-        </pc:spChg>
-        <pc:spChg chg="mod">
-          <ac:chgData name="Fedurca Luděk, Ing." userId="S::fedurca@spravazeleznic.cz::81cdee8f-9e75-4ae4-8978-85a63504bab6" providerId="AD" clId="Web-{00000000-0000-0000-0000-000000000000}" dt="2026-09-14T08:33:47.163" v="38" actId="14100"/>
-          <ac:spMkLst>
-            <pc:docMk/>
-            <pc:sldMk cId="2059199687" sldId="321"/>
-            <ac:spMk id="4" creationId="{2A6487AA-0CBF-20E5-2922-4E4EF0049F8B}"/>
-          </ac:spMkLst>
-        </pc:spChg>
-        <pc:spChg chg="add del mod">
-          <ac:chgData name="Fedurca Luděk, Ing." userId="S::fedurca@spravazeleznic.cz::81cdee8f-9e75-4ae4-8978-85a63504bab6" providerId="AD" clId="Web-{00000000-0000-0000-0000-000000000000}" dt="2026-09-14T08:34:05.742" v="39" actId="14100"/>
-          <ac:spMkLst>
-            <pc:docMk/>
-            <pc:sldMk cId="2059199687" sldId="321"/>
-            <ac:spMk id="5" creationId="{4DF5838D-B7FA-0EA5-BC60-807940D84180}"/>
-          </ac:spMkLst>
-        </pc:spChg>
-        <pc:spChg chg="del">
-          <ac:chgData name="Fedurca Luděk, Ing." userId="S::fedurca@spravazeleznic.cz::81cdee8f-9e75-4ae4-8978-85a63504bab6" providerId="AD" clId="Web-{00000000-0000-0000-0000-000000000000}" dt="2026-09-14T08:32:09.347" v="18"/>
-          <ac:spMkLst>
-            <pc:docMk/>
-            <pc:sldMk cId="2059199687" sldId="321"/>
-            <ac:spMk id="6" creationId="{43785D4B-E3FF-8A54-5160-464A8D9159E4}"/>
-          </ac:spMkLst>
-        </pc:spChg>
-        <pc:spChg chg="del">
-          <ac:chgData name="Fedurca Luděk, Ing." userId="S::fedurca@spravazeleznic.cz::81cdee8f-9e75-4ae4-8978-85a63504bab6" providerId="AD" clId="Web-{00000000-0000-0000-0000-000000000000}" dt="2026-09-14T08:32:09.347" v="17"/>
-          <ac:spMkLst>
-            <pc:docMk/>
-            <pc:sldMk cId="2059199687" sldId="321"/>
-            <ac:spMk id="7" creationId="{1C4DD67F-F43C-A90F-2E87-30B90B5BBA67}"/>
-          </ac:spMkLst>
-        </pc:spChg>
-        <pc:spChg chg="del">
-          <ac:chgData name="Fedurca Luděk, Ing." userId="S::fedurca@spravazeleznic.cz::81cdee8f-9e75-4ae4-8978-85a63504bab6" providerId="AD" clId="Web-{00000000-0000-0000-0000-000000000000}" dt="2026-09-14T08:32:09.347" v="16"/>
-          <ac:spMkLst>
-            <pc:docMk/>
-            <pc:sldMk cId="2059199687" sldId="321"/>
-            <ac:spMk id="8" creationId="{4575AB92-3D6F-5D6A-E741-669428CFF302}"/>
-          </ac:spMkLst>
-        </pc:spChg>
-        <pc:spChg chg="del">
-          <ac:chgData name="Fedurca Luděk, Ing." userId="S::fedurca@spravazeleznic.cz::81cdee8f-9e75-4ae4-8978-85a63504bab6" providerId="AD" clId="Web-{00000000-0000-0000-0000-000000000000}" dt="2026-09-14T08:32:09.347" v="15"/>
-          <ac:spMkLst>
-            <pc:docMk/>
-            <pc:sldMk cId="2059199687" sldId="321"/>
-            <ac:spMk id="9" creationId="{88DB4BBC-609F-63BD-3B59-F203E7295EEE}"/>
-          </ac:spMkLst>
-        </pc:spChg>
-        <pc:spChg chg="del">
-          <ac:chgData name="Fedurca Luděk, Ing." userId="S::fedurca@spravazeleznic.cz::81cdee8f-9e75-4ae4-8978-85a63504bab6" providerId="AD" clId="Web-{00000000-0000-0000-0000-000000000000}" dt="2026-09-14T08:32:09.347" v="14"/>
-          <ac:spMkLst>
-            <pc:docMk/>
-            <pc:sldMk cId="2059199687" sldId="321"/>
-            <ac:spMk id="10" creationId="{49F0701B-5023-995C-4848-962DBCF01879}"/>
-          </ac:spMkLst>
-        </pc:spChg>
-        <pc:spChg chg="del">
-          <ac:chgData name="Fedurca Luděk, Ing." userId="S::fedurca@spravazeleznic.cz::81cdee8f-9e75-4ae4-8978-85a63504bab6" providerId="AD" clId="Web-{00000000-0000-0000-0000-000000000000}" dt="2026-09-14T08:32:09.347" v="13"/>
-          <ac:spMkLst>
-            <pc:docMk/>
-            <pc:sldMk cId="2059199687" sldId="321"/>
-            <ac:spMk id="11" creationId="{5C78C4D8-FC52-1464-7474-FC27FCB90061}"/>
-          </ac:spMkLst>
-        </pc:spChg>
-        <pc:spChg chg="del">
-          <ac:chgData name="Fedurca Luděk, Ing." userId="S::fedurca@spravazeleznic.cz::81cdee8f-9e75-4ae4-8978-85a63504bab6" providerId="AD" clId="Web-{00000000-0000-0000-0000-000000000000}" dt="2026-09-14T08:32:09.347" v="12"/>
-          <ac:spMkLst>
-            <pc:docMk/>
-            <pc:sldMk cId="2059199687" sldId="321"/>
-            <ac:spMk id="12" creationId="{1759109A-1F12-23AD-6DBF-64DEB8FD4D9E}"/>
-          </ac:spMkLst>
-        </pc:spChg>
-        <pc:spChg chg="del">
-          <ac:chgData name="Fedurca Luděk, Ing." userId="S::fedurca@spravazeleznic.cz::81cdee8f-9e75-4ae4-8978-85a63504bab6" providerId="AD" clId="Web-{00000000-0000-0000-0000-000000000000}" dt="2026-09-14T08:32:09.347" v="11"/>
-          <ac:spMkLst>
-            <pc:docMk/>
-            <pc:sldMk cId="2059199687" sldId="321"/>
-            <ac:spMk id="13" creationId="{60EC5034-AFBC-7E9D-D343-6460D295B400}"/>
-          </ac:spMkLst>
-        </pc:spChg>
-        <pc:spChg chg="del">
-          <ac:chgData name="Fedurca Luděk, Ing." userId="S::fedurca@spravazeleznic.cz::81cdee8f-9e75-4ae4-8978-85a63504bab6" providerId="AD" clId="Web-{00000000-0000-0000-0000-000000000000}" dt="2026-09-14T08:32:09.347" v="10"/>
-          <ac:spMkLst>
-            <pc:docMk/>
-            <pc:sldMk cId="2059199687" sldId="321"/>
-            <ac:spMk id="14" creationId="{32977E73-32D2-B872-DFEE-C99E35A12AD6}"/>
-          </ac:spMkLst>
-        </pc:spChg>
-        <pc:spChg chg="del">
-          <ac:chgData name="Fedurca Luděk, Ing." userId="S::fedurca@spravazeleznic.cz::81cdee8f-9e75-4ae4-8978-85a63504bab6" providerId="AD" clId="Web-{00000000-0000-0000-0000-000000000000}" dt="2026-09-14T08:32:09.347" v="9"/>
-          <ac:spMkLst>
-            <pc:docMk/>
-            <pc:sldMk cId="2059199687" sldId="321"/>
-            <ac:spMk id="15" creationId="{A800982A-2B4F-FCAD-75B5-027DF1CB2906}"/>
-          </ac:spMkLst>
-        </pc:spChg>
-        <pc:spChg chg="del">
-          <ac:chgData name="Fedurca Luděk, Ing." userId="S::fedurca@spravazeleznic.cz::81cdee8f-9e75-4ae4-8978-85a63504bab6" providerId="AD" clId="Web-{00000000-0000-0000-0000-000000000000}" dt="2026-09-14T08:32:09.347" v="8"/>
-          <ac:spMkLst>
-            <pc:docMk/>
-            <pc:sldMk cId="2059199687" sldId="321"/>
-            <ac:spMk id="16" creationId="{8D67551D-56FB-8A96-84BC-1C973F02DD38}"/>
-          </ac:spMkLst>
-        </pc:spChg>
-        <pc:spChg chg="del">
-          <ac:chgData name="Fedurca Luděk, Ing." userId="S::fedurca@spravazeleznic.cz::81cdee8f-9e75-4ae4-8978-85a63504bab6" providerId="AD" clId="Web-{00000000-0000-0000-0000-000000000000}" dt="2026-09-14T08:32:09.347" v="7"/>
-          <ac:spMkLst>
-            <pc:docMk/>
-            <pc:sldMk cId="2059199687" sldId="321"/>
-            <ac:spMk id="17" creationId="{F2A1F3F0-5E1A-A368-C6B4-0B9AF8D6E041}"/>
-          </ac:spMkLst>
-        </pc:spChg>
-        <pc:spChg chg="del">
-          <ac:chgData name="Fedurca Luděk, Ing." userId="S::fedurca@spravazeleznic.cz::81cdee8f-9e75-4ae4-8978-85a63504bab6" providerId="AD" clId="Web-{00000000-0000-0000-0000-000000000000}" dt="2026-09-14T08:32:09.347" v="6"/>
-          <ac:spMkLst>
-            <pc:docMk/>
-            <pc:sldMk cId="2059199687" sldId="321"/>
-            <ac:spMk id="18" creationId="{20EC340C-006A-8824-E6D0-2D3504DEDCE1}"/>
-          </ac:spMkLst>
-        </pc:spChg>
-        <pc:spChg chg="del">
-          <ac:chgData name="Fedurca Luděk, Ing." userId="S::fedurca@spravazeleznic.cz::81cdee8f-9e75-4ae4-8978-85a63504bab6" providerId="AD" clId="Web-{00000000-0000-0000-0000-000000000000}" dt="2026-09-14T08:32:09.347" v="5"/>
-          <ac:spMkLst>
-            <pc:docMk/>
-            <pc:sldMk cId="2059199687" sldId="321"/>
-            <ac:spMk id="19" creationId="{7950DD20-0F3A-0E4F-F854-E59F298EDDAA}"/>
-          </ac:spMkLst>
-        </pc:spChg>
-        <pc:spChg chg="del">
-          <ac:chgData name="Fedurca Luděk, Ing." userId="S::fedurca@spravazeleznic.cz::81cdee8f-9e75-4ae4-8978-85a63504bab6" providerId="AD" clId="Web-{00000000-0000-0000-0000-000000000000}" dt="2026-09-14T08:32:09.347" v="4"/>
-          <ac:spMkLst>
-            <pc:docMk/>
-            <pc:sldMk cId="2059199687" sldId="321"/>
-            <ac:spMk id="20" creationId="{C1D6A1F1-1F11-943A-CD27-0BBCC9145379}"/>
-          </ac:spMkLst>
-        </pc:spChg>
-        <pc:spChg chg="del">
-          <ac:chgData name="Fedurca Luděk, Ing." userId="S::fedurca@spravazeleznic.cz::81cdee8f-9e75-4ae4-8978-85a63504bab6" providerId="AD" clId="Web-{00000000-0000-0000-0000-000000000000}" dt="2026-09-14T08:32:09.347" v="3"/>
-          <ac:spMkLst>
-            <pc:docMk/>
-            <pc:sldMk cId="2059199687" sldId="321"/>
-            <ac:spMk id="21" creationId="{D8E5D2E1-53D1-11AC-D1BF-1709E6E3E2E9}"/>
-          </ac:spMkLst>
-        </pc:spChg>
-      </pc:sldChg>
-    </pc:docChg>
-  </pc:docChgLst>
-  <pc:docChgLst>
-    <pc:chgData name="Fedurca Luděk, Ing." userId="S::fedurca@spravazeleznic.cz::81cdee8f-9e75-4ae4-8978-85a63504bab6" providerId="AD" clId="Web-{7437D7FF-36F5-7591-8794-4AF3F176C10B}"/>
-    <pc:docChg chg="addSld delSld modSld sldOrd">
-      <pc:chgData name="Fedurca Luděk, Ing." userId="S::fedurca@spravazeleznic.cz::81cdee8f-9e75-4ae4-8978-85a63504bab6" providerId="AD" clId="Web-{7437D7FF-36F5-7591-8794-4AF3F176C10B}" dt="2026-09-14T08:37:00.357" v="112" actId="20577"/>
-      <pc:docMkLst>
-        <pc:docMk/>
-      </pc:docMkLst>
-      <pc:sldChg chg="addSp delSp modSp">
-        <pc:chgData name="Fedurca Luděk, Ing." userId="S::fedurca@spravazeleznic.cz::81cdee8f-9e75-4ae4-8978-85a63504bab6" providerId="AD" clId="Web-{7437D7FF-36F5-7591-8794-4AF3F176C10B}" dt="2026-09-14T08:27:41.208" v="74" actId="1076"/>
-        <pc:sldMkLst>
-          <pc:docMk/>
-          <pc:sldMk cId="0" sldId="256"/>
-        </pc:sldMkLst>
-        <pc:spChg chg="del mod">
-          <ac:chgData name="Fedurca Luděk, Ing." userId="S::fedurca@spravazeleznic.cz::81cdee8f-9e75-4ae4-8978-85a63504bab6" providerId="AD" clId="Web-{7437D7FF-36F5-7591-8794-4AF3F176C10B}" dt="2026-09-14T08:26:54.972" v="66"/>
-          <ac:spMkLst>
-            <pc:docMk/>
-            <pc:sldMk cId="0" sldId="256"/>
-            <ac:spMk id="2" creationId="{00000000-0000-0000-0000-000000000000}"/>
-          </ac:spMkLst>
-        </pc:spChg>
-        <pc:spChg chg="del">
-          <ac:chgData name="Fedurca Luděk, Ing." userId="S::fedurca@spravazeleznic.cz::81cdee8f-9e75-4ae4-8978-85a63504bab6" providerId="AD" clId="Web-{7437D7FF-36F5-7591-8794-4AF3F176C10B}" dt="2026-09-14T08:27:12.379" v="69"/>
-          <ac:spMkLst>
-            <pc:docMk/>
-            <pc:sldMk cId="0" sldId="256"/>
-            <ac:spMk id="5" creationId="{00000000-0000-0000-0000-000000000000}"/>
-          </ac:spMkLst>
-        </pc:spChg>
-        <pc:spChg chg="del">
-          <ac:chgData name="Fedurca Luděk, Ing." userId="S::fedurca@spravazeleznic.cz::81cdee8f-9e75-4ae4-8978-85a63504bab6" providerId="AD" clId="Web-{7437D7FF-36F5-7591-8794-4AF3F176C10B}" dt="2026-09-14T08:27:22.489" v="71"/>
-          <ac:spMkLst>
-            <pc:docMk/>
-            <pc:sldMk cId="0" sldId="256"/>
-            <ac:spMk id="6" creationId="{00000000-0000-0000-0000-000000000000}"/>
-          </ac:spMkLst>
-        </pc:spChg>
-        <pc:spChg chg="del">
-          <ac:chgData name="Fedurca Luděk, Ing." userId="S::fedurca@spravazeleznic.cz::81cdee8f-9e75-4ae4-8978-85a63504bab6" providerId="AD" clId="Web-{7437D7FF-36F5-7591-8794-4AF3F176C10B}" dt="2026-09-14T08:27:29.239" v="73"/>
-          <ac:spMkLst>
-            <pc:docMk/>
-            <pc:sldMk cId="0" sldId="256"/>
-            <ac:spMk id="7" creationId="{00000000-0000-0000-0000-000000000000}"/>
-          </ac:spMkLst>
-        </pc:spChg>
-        <pc:spChg chg="add">
-          <ac:chgData name="Fedurca Luděk, Ing." userId="S::fedurca@spravazeleznic.cz::81cdee8f-9e75-4ae4-8978-85a63504bab6" providerId="AD" clId="Web-{7437D7FF-36F5-7591-8794-4AF3F176C10B}" dt="2026-09-14T08:27:13.629" v="70"/>
-          <ac:spMkLst>
-            <pc:docMk/>
-            <pc:sldMk cId="0" sldId="256"/>
-            <ac:spMk id="11" creationId="{12EA5D03-B88C-AC48-9595-A1CA2B1CAC99}"/>
-          </ac:spMkLst>
-        </pc:spChg>
-        <pc:spChg chg="add">
-          <ac:chgData name="Fedurca Luděk, Ing." userId="S::fedurca@spravazeleznic.cz::81cdee8f-9e75-4ae4-8978-85a63504bab6" providerId="AD" clId="Web-{7437D7FF-36F5-7591-8794-4AF3F176C10B}" dt="2026-09-14T08:27:23.802" v="72"/>
-          <ac:spMkLst>
-            <pc:docMk/>
-            <pc:sldMk cId="0" sldId="256"/>
-            <ac:spMk id="12" creationId="{123FC13F-988C-3E07-FCBC-392AA851CE3A}"/>
-          </ac:spMkLst>
-        </pc:spChg>
-        <pc:picChg chg="del mod">
-          <ac:chgData name="Fedurca Luděk, Ing." userId="S::fedurca@spravazeleznic.cz::81cdee8f-9e75-4ae4-8978-85a63504bab6" providerId="AD" clId="Web-{7437D7FF-36F5-7591-8794-4AF3F176C10B}" dt="2026-09-14T08:26:56.066" v="67"/>
-          <ac:picMkLst>
-            <pc:docMk/>
-            <pc:sldMk cId="0" sldId="256"/>
-            <ac:picMk id="4" creationId="{00000000-0000-0000-0000-000000000000}"/>
-          </ac:picMkLst>
-        </pc:picChg>
-        <pc:picChg chg="add mod modCrop">
-          <ac:chgData name="Fedurca Luděk, Ing." userId="S::fedurca@spravazeleznic.cz::81cdee8f-9e75-4ae4-8978-85a63504bab6" providerId="AD" clId="Web-{7437D7FF-36F5-7591-8794-4AF3F176C10B}" dt="2026-09-14T08:27:41.208" v="74" actId="1076"/>
-          <ac:picMkLst>
-            <pc:docMk/>
-            <pc:sldMk cId="0" sldId="256"/>
-            <ac:picMk id="10" creationId="{5093834E-C451-3322-8C58-3D275928841B}"/>
-          </ac:picMkLst>
-        </pc:picChg>
-      </pc:sldChg>
-      <pc:sldChg chg="addSp delSp modSp">
-        <pc:chgData name="Fedurca Luděk, Ing." userId="S::fedurca@spravazeleznic.cz::81cdee8f-9e75-4ae4-8978-85a63504bab6" providerId="AD" clId="Web-{7437D7FF-36F5-7591-8794-4AF3F176C10B}" dt="2026-09-14T08:25:28.297" v="55"/>
-        <pc:sldMkLst>
-          <pc:docMk/>
-          <pc:sldMk cId="0" sldId="257"/>
-        </pc:sldMkLst>
-        <pc:spChg chg="mod">
-          <ac:chgData name="Fedurca Luděk, Ing." userId="S::fedurca@spravazeleznic.cz::81cdee8f-9e75-4ae4-8978-85a63504bab6" providerId="AD" clId="Web-{7437D7FF-36F5-7591-8794-4AF3F176C10B}" dt="2026-09-14T08:18:04.341" v="9" actId="1076"/>
-          <ac:spMkLst>
-            <pc:docMk/>
-            <pc:sldMk cId="0" sldId="257"/>
-            <ac:spMk id="7" creationId="{00000000-0000-0000-0000-000000000000}"/>
-          </ac:spMkLst>
-        </pc:spChg>
-        <pc:spChg chg="mod">
-          <ac:chgData name="Fedurca Luděk, Ing." userId="S::fedurca@spravazeleznic.cz::81cdee8f-9e75-4ae4-8978-85a63504bab6" providerId="AD" clId="Web-{7437D7FF-36F5-7591-8794-4AF3F176C10B}" dt="2026-09-14T08:18:13.372" v="10" actId="1076"/>
-          <ac:spMkLst>
-            <pc:docMk/>
-            <pc:sldMk cId="0" sldId="257"/>
-            <ac:spMk id="8" creationId="{00000000-0000-0000-0000-000000000000}"/>
-          </ac:spMkLst>
-        </pc:spChg>
-        <pc:spChg chg="mod">
-          <ac:chgData name="Fedurca Luděk, Ing." userId="S::fedurca@spravazeleznic.cz::81cdee8f-9e75-4ae4-8978-85a63504bab6" providerId="AD" clId="Web-{7437D7FF-36F5-7591-8794-4AF3F176C10B}" dt="2026-09-14T08:17:47.965" v="6" actId="1076"/>
-          <ac:spMkLst>
-            <pc:docMk/>
-            <pc:sldMk cId="0" sldId="257"/>
-            <ac:spMk id="12" creationId="{00000000-0000-0000-0000-000000000000}"/>
-          </ac:spMkLst>
-        </pc:spChg>
-        <pc:spChg chg="mod">
-          <ac:chgData name="Fedurca Luděk, Ing." userId="S::fedurca@spravazeleznic.cz::81cdee8f-9e75-4ae4-8978-85a63504bab6" providerId="AD" clId="Web-{7437D7FF-36F5-7591-8794-4AF3F176C10B}" dt="2026-09-14T08:17:57.700" v="7" actId="1076"/>
-          <ac:spMkLst>
-            <pc:docMk/>
-            <pc:sldMk cId="0" sldId="257"/>
-            <ac:spMk id="13" creationId="{00000000-0000-0000-0000-000000000000}"/>
-          </ac:spMkLst>
-        </pc:spChg>
-        <pc:spChg chg="mod">
-          <ac:chgData name="Fedurca Luděk, Ing." userId="S::fedurca@spravazeleznic.cz::81cdee8f-9e75-4ae4-8978-85a63504bab6" providerId="AD" clId="Web-{7437D7FF-36F5-7591-8794-4AF3F176C10B}" dt="2026-09-14T08:18:21.967" v="12" actId="1076"/>
-          <ac:spMkLst>
-            <pc:docMk/>
-            <pc:sldMk cId="0" sldId="257"/>
-            <ac:spMk id="17" creationId="{00000000-0000-0000-0000-000000000000}"/>
-          </ac:spMkLst>
-        </pc:spChg>
-        <pc:spChg chg="mod">
-          <ac:chgData name="Fedurca Luděk, Ing." userId="S::fedurca@spravazeleznic.cz::81cdee8f-9e75-4ae4-8978-85a63504bab6" providerId="AD" clId="Web-{7437D7FF-36F5-7591-8794-4AF3F176C10B}" dt="2026-09-14T08:18:26.123" v="13" actId="1076"/>
-          <ac:spMkLst>
-            <pc:docMk/>
-            <pc:sldMk cId="0" sldId="257"/>
-            <ac:spMk id="18" creationId="{00000000-0000-0000-0000-000000000000}"/>
-          </ac:spMkLst>
-        </pc:spChg>
-        <pc:picChg chg="add del mod">
-          <ac:chgData name="Fedurca Luděk, Ing." userId="S::fedurca@spravazeleznic.cz::81cdee8f-9e75-4ae4-8978-85a63504bab6" providerId="AD" clId="Web-{7437D7FF-36F5-7591-8794-4AF3F176C10B}" dt="2026-09-14T08:25:28.297" v="55"/>
-          <ac:picMkLst>
-            <pc:docMk/>
-            <pc:sldMk cId="0" sldId="257"/>
-            <ac:picMk id="22" creationId="{A819B768-5146-169B-4CC0-F50C40049F82}"/>
-          </ac:picMkLst>
-        </pc:picChg>
-      </pc:sldChg>
-      <pc:sldChg chg="addSp modSp del ord">
-        <pc:chgData name="Fedurca Luděk, Ing." userId="S::fedurca@spravazeleznic.cz::81cdee8f-9e75-4ae4-8978-85a63504bab6" providerId="AD" clId="Web-{7437D7FF-36F5-7591-8794-4AF3F176C10B}" dt="2026-09-14T08:28:07.960" v="77"/>
-        <pc:sldMkLst>
-          <pc:docMk/>
-          <pc:sldMk cId="0" sldId="260"/>
-        </pc:sldMkLst>
-        <pc:spChg chg="mod">
-          <ac:chgData name="Fedurca Luděk, Ing." userId="S::fedurca@spravazeleznic.cz::81cdee8f-9e75-4ae4-8978-85a63504bab6" providerId="AD" clId="Web-{7437D7FF-36F5-7591-8794-4AF3F176C10B}" dt="2026-09-14T08:19:31.454" v="15" actId="14100"/>
-          <ac:spMkLst>
-            <pc:docMk/>
-            <pc:sldMk cId="0" sldId="260"/>
-            <ac:spMk id="28" creationId="{00000000-0000-0000-0000-000000000000}"/>
-          </ac:spMkLst>
-        </pc:spChg>
-        <pc:spChg chg="mod">
-          <ac:chgData name="Fedurca Luděk, Ing." userId="S::fedurca@spravazeleznic.cz::81cdee8f-9e75-4ae4-8978-85a63504bab6" providerId="AD" clId="Web-{7437D7FF-36F5-7591-8794-4AF3F176C10B}" dt="2026-09-14T08:19:57.971" v="18" actId="20577"/>
-          <ac:spMkLst>
-            <pc:docMk/>
-            <pc:sldMk cId="0" sldId="260"/>
-            <ac:spMk id="29" creationId="{00000000-0000-0000-0000-000000000000}"/>
-          </ac:spMkLst>
-        </pc:spChg>
-        <pc:picChg chg="add mod">
-          <ac:chgData name="Fedurca Luděk, Ing." userId="S::fedurca@spravazeleznic.cz::81cdee8f-9e75-4ae4-8978-85a63504bab6" providerId="AD" clId="Web-{7437D7FF-36F5-7591-8794-4AF3F176C10B}" dt="2026-09-14T08:23:40.324" v="44"/>
-          <ac:picMkLst>
-            <pc:docMk/>
-            <pc:sldMk cId="0" sldId="260"/>
-            <ac:picMk id="31" creationId="{D0DD6249-DE81-09FD-7449-A866D7B92B27}"/>
-          </ac:picMkLst>
-        </pc:picChg>
-      </pc:sldChg>
-      <pc:sldChg chg="modSp">
-        <pc:chgData name="Fedurca Luděk, Ing." userId="S::fedurca@spravazeleznic.cz::81cdee8f-9e75-4ae4-8978-85a63504bab6" providerId="AD" clId="Web-{7437D7FF-36F5-7591-8794-4AF3F176C10B}" dt="2026-09-14T08:22:28.867" v="43" actId="20577"/>
-        <pc:sldMkLst>
-          <pc:docMk/>
-          <pc:sldMk cId="0" sldId="261"/>
-        </pc:sldMkLst>
-        <pc:spChg chg="mod">
-          <ac:chgData name="Fedurca Luděk, Ing." userId="S::fedurca@spravazeleznic.cz::81cdee8f-9e75-4ae4-8978-85a63504bab6" providerId="AD" clId="Web-{7437D7FF-36F5-7591-8794-4AF3F176C10B}" dt="2026-09-14T08:21:30.631" v="35" actId="14100"/>
-          <ac:spMkLst>
-            <pc:docMk/>
-            <pc:sldMk cId="0" sldId="261"/>
-            <ac:spMk id="23" creationId="{00000000-0000-0000-0000-000000000000}"/>
-          </ac:spMkLst>
-        </pc:spChg>
-        <pc:spChg chg="mod">
-          <ac:chgData name="Fedurca Luděk, Ing." userId="S::fedurca@spravazeleznic.cz::81cdee8f-9e75-4ae4-8978-85a63504bab6" providerId="AD" clId="Web-{7437D7FF-36F5-7591-8794-4AF3F176C10B}" dt="2026-09-14T08:22:28.867" v="43" actId="20577"/>
-          <ac:spMkLst>
-            <pc:docMk/>
-            <pc:sldMk cId="0" sldId="261"/>
-            <ac:spMk id="24" creationId="{00000000-0000-0000-0000-000000000000}"/>
-          </ac:spMkLst>
-        </pc:spChg>
-      </pc:sldChg>
-      <pc:sldChg chg="del">
-        <pc:chgData name="Fedurca Luděk, Ing." userId="S::fedurca@spravazeleznic.cz::81cdee8f-9e75-4ae4-8978-85a63504bab6" providerId="AD" clId="Web-{7437D7FF-36F5-7591-8794-4AF3F176C10B}" dt="2026-09-14T08:28:14.507" v="78"/>
-        <pc:sldMkLst>
-          <pc:docMk/>
-          <pc:sldMk cId="0" sldId="262"/>
-        </pc:sldMkLst>
-      </pc:sldChg>
-      <pc:sldChg chg="addSp delSp modSp add del">
-        <pc:chgData name="Fedurca Luděk, Ing." userId="S::fedurca@spravazeleznic.cz::81cdee8f-9e75-4ae4-8978-85a63504bab6" providerId="AD" clId="Web-{7437D7FF-36F5-7591-8794-4AF3F176C10B}" dt="2026-09-14T08:28:16.522" v="79"/>
-        <pc:sldMkLst>
-          <pc:docMk/>
-          <pc:sldMk cId="0" sldId="319"/>
-        </pc:sldMkLst>
-        <pc:spChg chg="del">
-          <ac:chgData name="Fedurca Luděk, Ing." userId="S::fedurca@spravazeleznic.cz::81cdee8f-9e75-4ae4-8978-85a63504bab6" providerId="AD" clId="Web-{7437D7FF-36F5-7591-8794-4AF3F176C10B}" dt="2026-09-14T08:26:18.893" v="57"/>
-          <ac:spMkLst>
-            <pc:docMk/>
-            <pc:sldMk cId="0" sldId="319"/>
-            <ac:spMk id="14" creationId="{FCBA7381-3B44-5437-4944-BCEF97625DEF}"/>
-          </ac:spMkLst>
-        </pc:spChg>
-        <pc:picChg chg="add del mod">
-          <ac:chgData name="Fedurca Luděk, Ing." userId="S::fedurca@spravazeleznic.cz::81cdee8f-9e75-4ae4-8978-85a63504bab6" providerId="AD" clId="Web-{7437D7FF-36F5-7591-8794-4AF3F176C10B}" dt="2026-09-14T08:26:36.050" v="60"/>
-          <ac:picMkLst>
-            <pc:docMk/>
-            <pc:sldMk cId="0" sldId="319"/>
-            <ac:picMk id="2" creationId="{BFCC4184-1FAB-3E92-4182-7B1501F89245}"/>
-          </ac:picMkLst>
-        </pc:picChg>
-      </pc:sldChg>
-      <pc:sldChg chg="modSp add ord replId">
-        <pc:chgData name="Fedurca Luděk, Ing." userId="S::fedurca@spravazeleznic.cz::81cdee8f-9e75-4ae4-8978-85a63504bab6" providerId="AD" clId="Web-{7437D7FF-36F5-7591-8794-4AF3F176C10B}" dt="2026-09-14T08:29:02.399" v="94" actId="1076"/>
-        <pc:sldMkLst>
-          <pc:docMk/>
-          <pc:sldMk cId="1700726834" sldId="320"/>
-        </pc:sldMkLst>
-        <pc:spChg chg="mod">
-          <ac:chgData name="Fedurca Luděk, Ing." userId="S::fedurca@spravazeleznic.cz::81cdee8f-9e75-4ae4-8978-85a63504bab6" providerId="AD" clId="Web-{7437D7FF-36F5-7591-8794-4AF3F176C10B}" dt="2026-09-14T08:28:57.430" v="93" actId="1076"/>
-          <ac:spMkLst>
-            <pc:docMk/>
-            <pc:sldMk cId="1700726834" sldId="320"/>
-            <ac:spMk id="11" creationId="{20413189-886E-DC2A-6022-8444F714AF7F}"/>
-          </ac:spMkLst>
-        </pc:spChg>
-        <pc:spChg chg="mod">
-          <ac:chgData name="Fedurca Luděk, Ing." userId="S::fedurca@spravazeleznic.cz::81cdee8f-9e75-4ae4-8978-85a63504bab6" providerId="AD" clId="Web-{7437D7FF-36F5-7591-8794-4AF3F176C10B}" dt="2026-09-14T08:29:02.399" v="94" actId="1076"/>
-          <ac:spMkLst>
-            <pc:docMk/>
-            <pc:sldMk cId="1700726834" sldId="320"/>
-            <ac:spMk id="12" creationId="{4B36AB5D-CE37-A265-EC52-F9AD9D048C22}"/>
-          </ac:spMkLst>
-        </pc:spChg>
-      </pc:sldChg>
-      <pc:sldChg chg="delSp modSp">
-        <pc:chgData name="Fedurca Luděk, Ing." userId="S::fedurca@spravazeleznic.cz::81cdee8f-9e75-4ae4-8978-85a63504bab6" providerId="AD" clId="Web-{7437D7FF-36F5-7591-8794-4AF3F176C10B}" dt="2026-09-14T08:37:00.357" v="112" actId="20577"/>
-        <pc:sldMkLst>
-          <pc:docMk/>
-          <pc:sldMk cId="2059199687" sldId="321"/>
-        </pc:sldMkLst>
-        <pc:spChg chg="del">
-          <ac:chgData name="Fedurca Luděk, Ing." userId="S::fedurca@spravazeleznic.cz::81cdee8f-9e75-4ae4-8978-85a63504bab6" providerId="AD" clId="Web-{7437D7FF-36F5-7591-8794-4AF3F176C10B}" dt="2026-09-14T08:34:40.867" v="95"/>
-          <ac:spMkLst>
-            <pc:docMk/>
-            <pc:sldMk cId="2059199687" sldId="321"/>
-            <ac:spMk id="3" creationId="{254E2ACF-E8E3-F61A-3320-9D69B3C96C2E}"/>
-          </ac:spMkLst>
-        </pc:spChg>
-        <pc:spChg chg="mod">
-          <ac:chgData name="Fedurca Luděk, Ing." userId="S::fedurca@spravazeleznic.cz::81cdee8f-9e75-4ae4-8978-85a63504bab6" providerId="AD" clId="Web-{7437D7FF-36F5-7591-8794-4AF3F176C10B}" dt="2026-09-14T08:35:37.525" v="101" actId="1076"/>
-          <ac:spMkLst>
-            <pc:docMk/>
-            <pc:sldMk cId="2059199687" sldId="321"/>
-            <ac:spMk id="4" creationId="{2A6487AA-0CBF-20E5-2922-4E4EF0049F8B}"/>
-          </ac:spMkLst>
-        </pc:spChg>
-        <pc:spChg chg="mod">
-          <ac:chgData name="Fedurca Luděk, Ing." userId="S::fedurca@spravazeleznic.cz::81cdee8f-9e75-4ae4-8978-85a63504bab6" providerId="AD" clId="Web-{7437D7FF-36F5-7591-8794-4AF3F176C10B}" dt="2026-09-14T08:37:00.357" v="112" actId="20577"/>
-          <ac:spMkLst>
-            <pc:docMk/>
-            <pc:sldMk cId="2059199687" sldId="321"/>
-            <ac:spMk id="5" creationId="{4DF5838D-B7FA-0EA5-BC60-807940D84180}"/>
-          </ac:spMkLst>
-        </pc:spChg>
-      </pc:sldChg>
-      <pc:sldMasterChg chg="addSldLayout">
-        <pc:chgData name="Fedurca Luděk, Ing." userId="S::fedurca@spravazeleznic.cz::81cdee8f-9e75-4ae4-8978-85a63504bab6" providerId="AD" clId="Web-{7437D7FF-36F5-7591-8794-4AF3F176C10B}" dt="2026-09-14T08:26:09.955" v="56"/>
-        <pc:sldMasterMkLst>
-          <pc:docMk/>
-          <pc:sldMasterMk cId="0" sldId="2147483648"/>
-        </pc:sldMasterMkLst>
-        <pc:sldLayoutChg chg="add">
-          <pc:chgData name="Fedurca Luděk, Ing." userId="S::fedurca@spravazeleznic.cz::81cdee8f-9e75-4ae4-8978-85a63504bab6" providerId="AD" clId="Web-{7437D7FF-36F5-7591-8794-4AF3F176C10B}" dt="2026-09-14T08:26:09.955" v="56"/>
-          <pc:sldLayoutMkLst>
-            <pc:docMk/>
-            <pc:sldMasterMk cId="0" sldId="2147483648"/>
-            <pc:sldLayoutMk cId="3105370526" sldId="2147483651"/>
-          </pc:sldLayoutMkLst>
-        </pc:sldLayoutChg>
-      </pc:sldMasterChg>
-    </pc:docChg>
-  </pc:docChgLst>
-</pc:chgInfo>
 </file>
 
 <file path=ppt/notesMasters/notesMaster1.xml><?xml version="1.0" encoding="utf-8"?>
@@ -8381,7 +7912,7 @@
           <p:cNvPr id="7" name="Picture 6">
             <a:extLst>
               <a:ext uri="{FF2B5EF4-FFF2-40B4-BE49-F238E27FC236}">
-                <a16:creationId xmlns:a16="http://schemas.microsoft.com/office/drawing/2014/main" id="{D2118084-842C-85F5-DB40-A782E24C5A96}"/>
+                <a16:creationId xmlns:a16="http://schemas.microsoft.com/office/drawing/2014/main" id="{14ED6644-DCD4-3B7F-894C-F6D6B244E51F}"/>
               </a:ext>
             </a:extLst>
           </p:cNvPr>
@@ -8398,8 +7929,8 @@
         </p:blipFill>
         <p:spPr>
           <a:xfrm>
-            <a:off x="6733319" y="2835766"/>
-            <a:ext cx="2026633" cy="2007372"/>
+            <a:off x="6111463" y="2075194"/>
+            <a:ext cx="2730785" cy="2704832"/>
           </a:xfrm>
           <a:prstGeom prst="rect">
             <a:avLst/>
